--- a/SourceAssets/Docs/GothicChapel_Project_Overview_v2.pptx
+++ b/SourceAssets/Docs/GothicChapel_Project_Overview_v2.pptx
@@ -9757,7 +9757,7 @@
                 <a:ea typeface="Malgun Gothic" pitchFamily="34" charset="-122"/>
                 <a:cs typeface="Malgun Gothic" pitchFamily="34" charset="-120"/>
               </a:rPr>
-              <a:t>피난 흔적은 건축·제단 실루엣보다 앞서지 않게</a:t>
+              <a:t>소품은 건축·제단 실루엣보다 앞서지 않게</a:t>
             </a:r>
             <a:endParaRPr lang="en-US" sz="1300" dirty="0"/>
           </a:p>
@@ -10062,7 +10062,7 @@
                 <a:ea typeface="Malgun Gothic" pitchFamily="34" charset="-122"/>
                 <a:cs typeface="Malgun Gothic" pitchFamily="34" charset="-120"/>
               </a:rPr>
-              <a:t>Hero Asset &amp; 피난 흔적</a:t>
+              <a:t>Hero Asset &amp; 소품</a:t>
             </a:r>
             <a:endParaRPr lang="en-US" sz="2800" dirty="0"/>
           </a:p>
@@ -10101,7 +10101,7 @@
                 <a:ea typeface="Malgun Gothic" pitchFamily="34" charset="-122"/>
                 <a:cs typeface="Malgun Gothic" pitchFamily="34" charset="-120"/>
               </a:rPr>
-              <a:t>소품은 채우기가 아니라 ‘누가 언제 이곳에 머물렀는가’를 보여주는 묶음</a:t>
+              <a:t>소품은 채우기가 아니라 ‘무엇이 무너졌고 얼마나 오래 방치되었는가’를 보여주는 묶음</a:t>
             </a:r>
             <a:endParaRPr lang="en-US" sz="1200" dirty="0"/>
           </a:p>
@@ -10572,7 +10572,7 @@
                 <a:ea typeface="Malgun Gothic" pitchFamily="34" charset="-122"/>
                 <a:cs typeface="Malgun Gothic" pitchFamily="34" charset="-120"/>
               </a:rPr>
-              <a:t>피난 소품은 보존된 중앙~동쪽 Bay에 배치</a:t>
+              <a:t>소품은 보존된 중앙~동쪽 Bay에 배치</a:t>
             </a:r>
             <a:endParaRPr lang="en-US" sz="1200" dirty="0"/>
           </a:p>
@@ -10614,7 +10614,7 @@
                 <a:ea typeface="Malgun Gothic" pitchFamily="34" charset="-122"/>
                 <a:cs typeface="Malgun Gothic" pitchFamily="34" charset="-120"/>
               </a:rPr>
-              <a:t>촛대·천·짐꾸러미는 낮게, 시선을 제단 쪽으로</a:t>
+              <a:t>촛대·천은 낮게, 시선을 제단 쪽으로</a:t>
             </a:r>
             <a:endParaRPr lang="en-US" sz="1200" dirty="0"/>
           </a:p>
@@ -10635,7 +10635,7 @@
                 <a:ea typeface="Malgun Gothic" pitchFamily="34" charset="-122"/>
                 <a:cs typeface="Malgun Gothic" pitchFamily="34" charset="-120"/>
               </a:rPr>
-              <a:t>예배당 → 피난처 → 붕괴 → 방치로 읽히게</a:t>
+              <a:t>예배당 → 붕괴 → 방치로 읽히게</a:t>
             </a:r>
             <a:endParaRPr lang="en-US" sz="1200" dirty="0"/>
           </a:p>
@@ -14840,7 +14840,7 @@
                 <a:ea typeface="Malgun Gothic" pitchFamily="34" charset="-122"/>
                 <a:cs typeface="Malgun Gothic" pitchFamily="34" charset="-120"/>
               </a:rPr>
-              <a:t>전쟁·재난으로 반파된 뒤 피난처·야전 치료소로 쓰이다 방치된 소규모 석조 예배당</a:t>
+              <a:t>외딴 언덕 위, 전쟁 또는 재난으로 서쪽부터 무너진 뒤 오랜 세월 방치된 소규모 석조 예배당</a:t>
             </a:r>
             <a:endParaRPr lang="en-US" sz="1300" dirty="0"/>
           </a:p>
@@ -14996,7 +14996,7 @@
                 <a:ea typeface="Malgun Gothic" pitchFamily="34" charset="-122"/>
                 <a:cs typeface="Malgun Gothic" pitchFamily="34" charset="-120"/>
               </a:rPr>
-              <a:t>Hero Asset · 모듈러 키트 · PBR · 파손/사용 흔적 · Bay 생성 시스템 · Lumen · 최적화</a:t>
+              <a:t>Hero Asset · 모듈러 키트 · PBR · 파손/방치 흔적 · Bay 생성 시스템 · Lumen · 최적화</a:t>
             </a:r>
             <a:endParaRPr lang="en-US" sz="1300" dirty="0"/>
           </a:p>
@@ -21228,7 +21228,7 @@
                 <a:ea typeface="Malgun Gothic" pitchFamily="34" charset="-122"/>
                 <a:cs typeface="Malgun Gothic" pitchFamily="34" charset="-120"/>
               </a:rPr>
-              <a:t>벤치 A/B, 촛대, 헤진 천, 짐꾸러미, 상자 — 피난처 흔적을 최소 수량으로</a:t>
+              <a:t>벤치 A/B, 촛대, 헤진 제단 천 — 원래 예배 공간이었음을 최소 수량으로</a:t>
             </a:r>
             <a:endParaRPr lang="en-US" sz="1100" dirty="0"/>
           </a:p>
@@ -21689,7 +21689,7 @@
                 <a:ea typeface="Malgun Gothic" pitchFamily="34" charset="-122"/>
                 <a:cs typeface="Malgun Gothic" pitchFamily="34" charset="-120"/>
               </a:rPr>
-              <a:t>필수 잔해, 최소 수량의 피난 흔적 소품</a:t>
+              <a:t>필수 잔해, 최소 수량의 예배 소품</a:t>
             </a:r>
             <a:endParaRPr lang="en-US" sz="1350" dirty="0"/>
           </a:p>
@@ -21877,7 +21877,7 @@
                 <a:ea typeface="Malgun Gothic" pitchFamily="34" charset="-122"/>
                 <a:cs typeface="Malgun Gothic" pitchFamily="34" charset="-120"/>
               </a:rPr>
-              <a:t>침상·의료 소품 중심의 야전 치료소 연출</a:t>
+              <a:t>공포·의식물 과밀, 건축 실루엣을 가리는 식생</a:t>
             </a:r>
             <a:endParaRPr lang="en-US" sz="1350" dirty="0"/>
           </a:p>
